--- a/docs/apresentacoes/SprintReview_2_CeresDiagnostico.pptx
+++ b/docs/apresentacoes/SprintReview_2_CeresDiagnostico.pptx
@@ -2841,6 +2841,19 @@
             <a:pPr marL="0" indent="0" algn="l">
               <a:buNone/>
             </a:pPr>
+            <a:endParaRPr lang="en-US" sz="1400" i="1" dirty="0">
+              <a:solidFill>
+                <a:srgbClr val="B0BEC5"/>
+              </a:solidFill>
+              <a:latin typeface="Calibri" pitchFamily="34" charset="0"/>
+              <a:ea typeface="Calibri" pitchFamily="34" charset="-122"/>
+              <a:cs typeface="Calibri" pitchFamily="34" charset="-120"/>
+            </a:endParaRPr>
+          </a:p>
+          <a:p>
+            <a:pPr marL="0" indent="0" algn="l">
+              <a:buNone/>
+            </a:pPr>
             <a:r>
               <a:rPr lang="en-US" sz="1400" i="1" dirty="0">
                 <a:solidFill>
@@ -2850,7 +2863,7 @@
                 <a:ea typeface="Calibri" pitchFamily="34" charset="-122"/>
                 <a:cs typeface="Calibri" pitchFamily="34" charset="-120"/>
               </a:rPr>
-              <a:t>Sprint 0 e 1 já apresentadas — este slide é contexto rápido.</a:t>
+              <a:t>.</a:t>
             </a:r>
             <a:endParaRPr lang="en-US" sz="1400" dirty="0"/>
           </a:p>
@@ -11023,7 +11036,7 @@
         </p:nvSpPr>
         <p:spPr>
           <a:xfrm>
-            <a:off x="228600" y="2029968"/>
+            <a:off x="228600" y="2052828"/>
             <a:ext cx="11704320" cy="822960"/>
           </a:xfrm>
           <a:prstGeom prst="rect">
